--- a/Projects/Module18-PackagingMiniCode/Module18 - Packaging MiniCode.pptx
+++ b/Projects/Module18-PackagingMiniCode/Module18 - Packaging MiniCode.pptx
@@ -2994,7 +2994,7 @@
                 <a:ea typeface="Calibri" pitchFamily="34" charset="-122"/>
                 <a:cs typeface="Calibri" pitchFamily="34" charset="-120"/>
               </a:rPr>
-              <a:t>CodingAgentFactory has been the only place in the solution that calls Environment.GetEnvironmentVariable since Module 3 — first for OPENAI_API_KEY, now for MINICODE_MODEL too. Two variables, one reader, same rule. DefaultModelId is still the literal "gpt-4.1-mini" this course has used throughout.</a:t>
+              <a:t>ChatClientFactory has been the only place in the solution that calls Environment.GetEnvironmentVariable since Module 2b — first for the provider's key, now for MINICODE_MODEL too. One more variable, one reader, same rule. DefaultModelId is still the literal "gpt-4.1-mini" this course has used throughout.</a:t>
             </a:r>
             <a:endParaRPr lang="en-US" sz="1350" dirty="0"/>
           </a:p>
@@ -4631,7 +4631,7 @@
                 <a:ea typeface="Courier New" pitchFamily="34" charset="-122"/>
                 <a:cs typeface="Courier New" pitchFamily="34" charset="-120"/>
               </a:rPr>
-              <a:t>// src/MiniCode.Agent/CodingAgentFactory.cs</a:t>
+              <a:t>// src/MiniCode.Agent/ChatClientFactory.cs</a:t>
             </a:r>
             <a:endParaRPr lang="en-US" sz="950" dirty="0"/>
           </a:p>
@@ -4750,7 +4750,7 @@
         <p:spPr>
           <a:xfrm>
             <a:off x="6638544" y="2516632"/>
-            <a:ext cx="4690872" cy="1724152"/>
+            <a:ext cx="4690872" cy="504952"/>
           </a:xfrm>
           <a:prstGeom prst="rect">
             <a:avLst/>
@@ -4777,7 +4777,7 @@
                 <a:ea typeface="Courier New" pitchFamily="34" charset="-122"/>
                 <a:cs typeface="Courier New" pitchFamily="34" charset="-120"/>
               </a:rPr>
-              <a:t>public static async Task&lt;ICodingAgent&gt; CreateAsync(</a:t>
+              <a:t>public static IChatClient Create()</a:t>
             </a:r>
             <a:endParaRPr lang="en-US" sz="950" dirty="0"/>
           </a:p>
@@ -4797,10 +4797,32 @@
                 <a:ea typeface="Courier New" pitchFamily="34" charset="-122"/>
                 <a:cs typeface="Courier New" pitchFamily="34" charset="-120"/>
               </a:rPr>
-              <a:t>    string workspaceRoot,</a:t>
+              <a:t>{</a:t>
             </a:r>
             <a:endParaRPr lang="en-US" sz="950" dirty="0"/>
           </a:p>
+        </p:txBody>
+      </p:sp>
+      <p:sp>
+        <p:nvSpPr>
+          <p:cNvPr id="17" name="Text 15"/>
+          <p:cNvSpPr txBox="1"/>
+          <p:nvPr/>
+        </p:nvSpPr>
+        <p:spPr>
+          <a:xfrm>
+            <a:off x="6638544" y="2948432"/>
+            <a:ext cx="4690872" cy="898652"/>
+          </a:xfrm>
+          <a:prstGeom prst="rect">
+            <a:avLst/>
+          </a:prstGeom>
+          <a:noFill/>
+          <a:ln/>
+        </p:spPr>
+        <p:txBody>
+          <a:bodyPr wrap="square" lIns="0" tIns="0" rIns="0" bIns="0" rtlCol="0" anchor="t"/>
+          <a:lstStyle/>
           <a:p>
             <a:pPr indent="0" marL="0">
               <a:lnSpc>
@@ -4811,13 +4833,13 @@
             <a:r>
               <a:rPr lang="en-US" sz="950" dirty="0">
                 <a:solidFill>
-                  <a:srgbClr val="CADCFC"/>
+                  <a:srgbClr val="3FBFB0"/>
                 </a:solidFill>
                 <a:latin typeface="Courier New" pitchFamily="34" charset="0"/>
                 <a:ea typeface="Courier New" pitchFamily="34" charset="-122"/>
                 <a:cs typeface="Courier New" pitchFamily="34" charset="-120"/>
               </a:rPr>
-              <a:t>    IApprovalPrompter prompter,</a:t>
+              <a:t>    string modelId =</a:t>
             </a:r>
             <a:endParaRPr lang="en-US" sz="950" dirty="0"/>
           </a:p>
@@ -4831,13 +4853,13 @@
             <a:r>
               <a:rPr lang="en-US" sz="950" dirty="0">
                 <a:solidFill>
-                  <a:srgbClr val="CADCFC"/>
+                  <a:srgbClr val="3FBFB0"/>
                 </a:solidFill>
                 <a:latin typeface="Courier New" pitchFamily="34" charset="0"/>
                 <a:ea typeface="Courier New" pitchFamily="34" charset="-122"/>
                 <a:cs typeface="Courier New" pitchFamily="34" charset="-120"/>
               </a:rPr>
-              <a:t>    CancellationToken cancellationToken = default)</a:t>
+              <a:t>        Environment.GetEnvironmentVariable(ModelVariable)</a:t>
             </a:r>
             <a:endParaRPr lang="en-US" sz="950" dirty="0"/>
           </a:p>
@@ -4851,13 +4873,13 @@
             <a:r>
               <a:rPr lang="en-US" sz="950" dirty="0">
                 <a:solidFill>
-                  <a:srgbClr val="CADCFC"/>
+                  <a:srgbClr val="3FBFB0"/>
                 </a:solidFill>
                 <a:latin typeface="Courier New" pitchFamily="34" charset="0"/>
                 <a:ea typeface="Courier New" pitchFamily="34" charset="-122"/>
                 <a:cs typeface="Courier New" pitchFamily="34" charset="-120"/>
               </a:rPr>
-              <a:t>{</a:t>
+              <a:t>            is { Length: &gt; 0 } configured</a:t>
             </a:r>
             <a:endParaRPr lang="en-US" sz="950" dirty="0"/>
           </a:p>
@@ -4871,13 +4893,13 @@
             <a:r>
               <a:rPr lang="en-US" sz="950" dirty="0">
                 <a:solidFill>
-                  <a:srgbClr val="CADCFC"/>
+                  <a:srgbClr val="3FBFB0"/>
                 </a:solidFill>
                 <a:latin typeface="Courier New" pitchFamily="34" charset="0"/>
                 <a:ea typeface="Courier New" pitchFamily="34" charset="-122"/>
                 <a:cs typeface="Courier New" pitchFamily="34" charset="-120"/>
               </a:rPr>
-              <a:t>    string apiKey =</a:t>
+              <a:t>        ? configured</a:t>
             </a:r>
             <a:endParaRPr lang="en-US" sz="950" dirty="0"/>
           </a:p>
@@ -4891,194 +4913,12 @@
             <a:r>
               <a:rPr lang="en-US" sz="950" dirty="0">
                 <a:solidFill>
-                  <a:srgbClr val="CADCFC"/>
+                  <a:srgbClr val="3FBFB0"/>
                 </a:solidFill>
                 <a:latin typeface="Courier New" pitchFamily="34" charset="0"/>
                 <a:ea typeface="Courier New" pitchFamily="34" charset="-122"/>
                 <a:cs typeface="Courier New" pitchFamily="34" charset="-120"/>
               </a:rPr>
-              <a:t>        Environment.GetEnvironmentVariable(ApiKeyVariable)</a:t>
-            </a:r>
-            <a:endParaRPr lang="en-US" sz="950" dirty="0"/>
-          </a:p>
-          <a:p>
-            <a:pPr indent="0" marL="0">
-              <a:lnSpc>
-                <a:spcPts val="1300"/>
-              </a:lnSpc>
-              <a:buNone/>
-            </a:pPr>
-            <a:r>
-              <a:rPr lang="en-US" sz="950" dirty="0">
-                <a:solidFill>
-                  <a:srgbClr val="CADCFC"/>
-                </a:solidFill>
-                <a:latin typeface="Courier New" pitchFamily="34" charset="0"/>
-                <a:ea typeface="Courier New" pitchFamily="34" charset="-122"/>
-                <a:cs typeface="Courier New" pitchFamily="34" charset="-120"/>
-              </a:rPr>
-              <a:t>        ?? throw new InvalidOperationException(</a:t>
-            </a:r>
-            <a:endParaRPr lang="en-US" sz="950" dirty="0"/>
-          </a:p>
-          <a:p>
-            <a:pPr indent="0" marL="0">
-              <a:lnSpc>
-                <a:spcPts val="1300"/>
-              </a:lnSpc>
-              <a:buNone/>
-            </a:pPr>
-            <a:r>
-              <a:rPr lang="en-US" sz="950" dirty="0">
-                <a:solidFill>
-                  <a:srgbClr val="CADCFC"/>
-                </a:solidFill>
-                <a:latin typeface="Courier New" pitchFamily="34" charset="0"/>
-                <a:ea typeface="Courier New" pitchFamily="34" charset="-122"/>
-                <a:cs typeface="Courier New" pitchFamily="34" charset="-120"/>
-              </a:rPr>
-              <a:t>            $"{ApiKeyVariable} is not set. Set it "</a:t>
-            </a:r>
-            <a:endParaRPr lang="en-US" sz="950" dirty="0"/>
-          </a:p>
-          <a:p>
-            <a:pPr indent="0" marL="0">
-              <a:lnSpc>
-                <a:spcPts val="1300"/>
-              </a:lnSpc>
-              <a:buNone/>
-            </a:pPr>
-            <a:r>
-              <a:rPr lang="en-US" sz="950" dirty="0">
-                <a:solidFill>
-                  <a:srgbClr val="CADCFC"/>
-                </a:solidFill>
-                <a:latin typeface="Courier New" pitchFamily="34" charset="0"/>
-                <a:ea typeface="Courier New" pitchFamily="34" charset="-122"/>
-                <a:cs typeface="Courier New" pitchFamily="34" charset="-120"/>
-              </a:rPr>
-              <a:t>            + "before running MiniCode.");</a:t>
-            </a:r>
-            <a:endParaRPr lang="en-US" sz="950" dirty="0"/>
-          </a:p>
-        </p:txBody>
-      </p:sp>
-      <p:sp>
-        <p:nvSpPr>
-          <p:cNvPr id="17" name="Text 15"/>
-          <p:cNvSpPr txBox="1"/>
-          <p:nvPr/>
-        </p:nvSpPr>
-        <p:spPr>
-          <a:xfrm>
-            <a:off x="6638544" y="4167632"/>
-            <a:ext cx="4690872" cy="898652"/>
-          </a:xfrm>
-          <a:prstGeom prst="rect">
-            <a:avLst/>
-          </a:prstGeom>
-          <a:noFill/>
-          <a:ln/>
-        </p:spPr>
-        <p:txBody>
-          <a:bodyPr wrap="square" lIns="0" tIns="0" rIns="0" bIns="0" rtlCol="0" anchor="t"/>
-          <a:lstStyle/>
-          <a:p>
-            <a:pPr indent="0" marL="0">
-              <a:lnSpc>
-                <a:spcPts val="1300"/>
-              </a:lnSpc>
-              <a:buNone/>
-            </a:pPr>
-            <a:r>
-              <a:rPr lang="en-US" sz="950" dirty="0">
-                <a:solidFill>
-                  <a:srgbClr val="3FBFB0"/>
-                </a:solidFill>
-                <a:latin typeface="Courier New" pitchFamily="34" charset="0"/>
-                <a:ea typeface="Courier New" pitchFamily="34" charset="-122"/>
-                <a:cs typeface="Courier New" pitchFamily="34" charset="-120"/>
-              </a:rPr>
-              <a:t>    string modelId =</a:t>
-            </a:r>
-            <a:endParaRPr lang="en-US" sz="950" dirty="0"/>
-          </a:p>
-          <a:p>
-            <a:pPr indent="0" marL="0">
-              <a:lnSpc>
-                <a:spcPts val="1300"/>
-              </a:lnSpc>
-              <a:buNone/>
-            </a:pPr>
-            <a:r>
-              <a:rPr lang="en-US" sz="950" dirty="0">
-                <a:solidFill>
-                  <a:srgbClr val="3FBFB0"/>
-                </a:solidFill>
-                <a:latin typeface="Courier New" pitchFamily="34" charset="0"/>
-                <a:ea typeface="Courier New" pitchFamily="34" charset="-122"/>
-                <a:cs typeface="Courier New" pitchFamily="34" charset="-120"/>
-              </a:rPr>
-              <a:t>        Environment.GetEnvironmentVariable(ModelVariable)</a:t>
-            </a:r>
-            <a:endParaRPr lang="en-US" sz="950" dirty="0"/>
-          </a:p>
-          <a:p>
-            <a:pPr indent="0" marL="0">
-              <a:lnSpc>
-                <a:spcPts val="1300"/>
-              </a:lnSpc>
-              <a:buNone/>
-            </a:pPr>
-            <a:r>
-              <a:rPr lang="en-US" sz="950" dirty="0">
-                <a:solidFill>
-                  <a:srgbClr val="3FBFB0"/>
-                </a:solidFill>
-                <a:latin typeface="Courier New" pitchFamily="34" charset="0"/>
-                <a:ea typeface="Courier New" pitchFamily="34" charset="-122"/>
-                <a:cs typeface="Courier New" pitchFamily="34" charset="-120"/>
-              </a:rPr>
-              <a:t>            is { Length: &gt; 0 } configured</a:t>
-            </a:r>
-            <a:endParaRPr lang="en-US" sz="950" dirty="0"/>
-          </a:p>
-          <a:p>
-            <a:pPr indent="0" marL="0">
-              <a:lnSpc>
-                <a:spcPts val="1300"/>
-              </a:lnSpc>
-              <a:buNone/>
-            </a:pPr>
-            <a:r>
-              <a:rPr lang="en-US" sz="950" dirty="0">
-                <a:solidFill>
-                  <a:srgbClr val="3FBFB0"/>
-                </a:solidFill>
-                <a:latin typeface="Courier New" pitchFamily="34" charset="0"/>
-                <a:ea typeface="Courier New" pitchFamily="34" charset="-122"/>
-                <a:cs typeface="Courier New" pitchFamily="34" charset="-120"/>
-              </a:rPr>
-              <a:t>        ? configured</a:t>
-            </a:r>
-            <a:endParaRPr lang="en-US" sz="950" dirty="0"/>
-          </a:p>
-          <a:p>
-            <a:pPr indent="0" marL="0">
-              <a:lnSpc>
-                <a:spcPts val="1300"/>
-              </a:lnSpc>
-              <a:buNone/>
-            </a:pPr>
-            <a:r>
-              <a:rPr lang="en-US" sz="950" dirty="0">
-                <a:solidFill>
-                  <a:srgbClr val="3FBFB0"/>
-                </a:solidFill>
-                <a:latin typeface="Courier New" pitchFamily="34" charset="0"/>
-                <a:ea typeface="Courier New" pitchFamily="34" charset="-122"/>
-                <a:cs typeface="Courier New" pitchFamily="34" charset="-120"/>
-              </a:rPr>
               <a:t>        : DefaultModelId;</a:t>
             </a:r>
             <a:endParaRPr lang="en-US" sz="950" dirty="0"/>
@@ -5118,7 +4958,7 @@
                 <a:ea typeface="Calibri" pitchFamily="34" charset="-122"/>
                 <a:cs typeface="Calibri" pitchFamily="34" charset="-120"/>
               </a:rPr>
-              <a:t>GetChatClient(ModelId) becomes GetChatClient(modelId). Nothing else in CreateAsync changes.</a:t>
+              <a:t>GetChatClient(ModelId) becomes GetChatClient(modelId). CodingAgentFactory does not change at all.</a:t>
             </a:r>
             <a:endParaRPr lang="en-US" sz="1050" dirty="0"/>
           </a:p>
